--- a/BDA_IFM/01-Introduction.pptx
+++ b/BDA_IFM/01-Introduction.pptx
@@ -238,7 +238,7 @@
           <a:p>
             <a:fld id="{268AB6CE-CE31-4FC7-8557-3932745726D8}" type="datetimeFigureOut">
               <a:rPr lang="zh-TW" altLang="en-US" smtClean="0"/>
-              <a:t>2025/9/12</a:t>
+              <a:t>2026/9/27</a:t>
             </a:fld>
             <a:endParaRPr lang="zh-TW" altLang="en-US"/>
           </a:p>
@@ -403,7 +403,7 @@
           <a:p>
             <a:fld id="{E076803C-FB85-4950-83A3-179C4E383B40}" type="datetimeFigureOut">
               <a:rPr lang="zh-TW" altLang="en-US" smtClean="0"/>
-              <a:t>2025/9/12</a:t>
+              <a:t>2026/9/27</a:t>
             </a:fld>
             <a:endParaRPr lang="zh-TW" altLang="en-US"/>
           </a:p>
@@ -2263,7 +2263,7 @@
           <a:p>
             <a:r>
               <a:rPr lang="en-US" altLang="zh-TW"/>
-              <a:t>Big Data Analytics, Fall 2025</a:t>
+              <a:t>Big Data Analytics, Fall 2026</a:t>
             </a:r>
             <a:endParaRPr lang="zh-TW" altLang="en-US"/>
           </a:p>
@@ -2435,7 +2435,7 @@
           <a:p>
             <a:r>
               <a:rPr lang="en-US" altLang="zh-TW"/>
-              <a:t>Big Data Analytics, Fall 2025</a:t>
+              <a:t>Big Data Analytics, Fall 2026</a:t>
             </a:r>
             <a:endParaRPr lang="zh-TW" altLang="en-US"/>
           </a:p>
@@ -2617,7 +2617,7 @@
           <a:p>
             <a:r>
               <a:rPr lang="en-US" altLang="zh-TW"/>
-              <a:t>Big Data Analytics, Fall 2025</a:t>
+              <a:t>Big Data Analytics, Fall 2026</a:t>
             </a:r>
             <a:endParaRPr lang="zh-TW" altLang="en-US"/>
           </a:p>
@@ -2789,7 +2789,7 @@
           <a:p>
             <a:r>
               <a:rPr lang="en-US" altLang="zh-TW"/>
-              <a:t>Big Data Analytics, Fall 2025</a:t>
+              <a:t>Big Data Analytics, Fall 2026</a:t>
             </a:r>
             <a:endParaRPr lang="zh-TW" altLang="en-US"/>
           </a:p>
@@ -3038,7 +3038,7 @@
           <a:p>
             <a:r>
               <a:rPr lang="en-US" altLang="zh-TW"/>
-              <a:t>Big Data Analytics, Fall 2025</a:t>
+              <a:t>Big Data Analytics, Fall 2026</a:t>
             </a:r>
             <a:endParaRPr lang="zh-TW" altLang="en-US"/>
           </a:p>
@@ -3271,7 +3271,7 @@
           <a:p>
             <a:r>
               <a:rPr lang="en-US" altLang="zh-TW"/>
-              <a:t>Big Data Analytics, Fall 2025</a:t>
+              <a:t>Big Data Analytics, Fall 2026</a:t>
             </a:r>
             <a:endParaRPr lang="zh-TW" altLang="en-US"/>
           </a:p>
@@ -3639,7 +3639,7 @@
           <a:p>
             <a:r>
               <a:rPr lang="en-US" altLang="zh-TW"/>
-              <a:t>Big Data Analytics, Fall 2025</a:t>
+              <a:t>Big Data Analytics, Fall 2026</a:t>
             </a:r>
             <a:endParaRPr lang="zh-TW" altLang="en-US"/>
           </a:p>
@@ -3760,7 +3760,7 @@
           <a:p>
             <a:r>
               <a:rPr lang="en-US" altLang="zh-TW"/>
-              <a:t>Big Data Analytics, Fall 2025</a:t>
+              <a:t>Big Data Analytics, Fall 2026</a:t>
             </a:r>
             <a:endParaRPr lang="zh-TW" altLang="en-US"/>
           </a:p>
@@ -3859,7 +3859,7 @@
           <a:p>
             <a:r>
               <a:rPr lang="en-US" altLang="zh-TW"/>
-              <a:t>Big Data Analytics, Fall 2025</a:t>
+              <a:t>Big Data Analytics, Fall 2026</a:t>
             </a:r>
             <a:endParaRPr lang="zh-TW" altLang="en-US"/>
           </a:p>
@@ -4138,7 +4138,7 @@
           <a:p>
             <a:r>
               <a:rPr lang="en-US" altLang="zh-TW"/>
-              <a:t>Big Data Analytics, Fall 2025</a:t>
+              <a:t>Big Data Analytics, Fall 2026</a:t>
             </a:r>
             <a:endParaRPr lang="zh-TW" altLang="en-US"/>
           </a:p>
@@ -4394,7 +4394,7 @@
           <a:p>
             <a:r>
               <a:rPr lang="en-US" altLang="zh-TW"/>
-              <a:t>Big Data Analytics, Fall 2025</a:t>
+              <a:t>Big Data Analytics, Fall 2026</a:t>
             </a:r>
             <a:endParaRPr lang="zh-TW" altLang="en-US"/>
           </a:p>
@@ -4609,7 +4609,7 @@
           <a:p>
             <a:r>
               <a:rPr lang="en-US" altLang="zh-TW"/>
-              <a:t>Big Data Analytics, Fall 2025</a:t>
+              <a:t>Big Data Analytics, Fall 2026</a:t>
             </a:r>
             <a:endParaRPr lang="zh-TW" altLang="en-US"/>
           </a:p>
@@ -5065,7 +5065,7 @@
           <a:p>
             <a:r>
               <a:rPr lang="en-US" altLang="zh-TW" dirty="0"/>
-              <a:t>Sep. 16, 2025</a:t>
+              <a:t>Sep. 29, 2026</a:t>
             </a:r>
             <a:endParaRPr lang="zh-TW" altLang="en-US" dirty="0"/>
           </a:p>
@@ -5088,7 +5088,7 @@
           <a:p>
             <a:r>
               <a:rPr lang="en-US" altLang="zh-TW"/>
-              <a:t>Big Data Analytics, Fall 2025</a:t>
+              <a:t>Big Data Analytics, Fall 2026</a:t>
             </a:r>
             <a:endParaRPr lang="zh-TW" altLang="en-US"/>
           </a:p>
@@ -5375,7 +5375,7 @@
           <a:p>
             <a:r>
               <a:rPr kumimoji="0" lang="en-US" altLang="zh-TW"/>
-              <a:t>Big Data Analytics, Fall 2025</a:t>
+              <a:t>Big Data Analytics, Fall 2026</a:t>
             </a:r>
           </a:p>
         </p:txBody>
@@ -8743,7 +8743,7 @@
           <a:p>
             <a:r>
               <a:rPr lang="en-US" altLang="zh-TW"/>
-              <a:t>Big Data Analytics, Fall 2025</a:t>
+              <a:t>Big Data Analytics, Fall 2026</a:t>
             </a:r>
             <a:endParaRPr lang="zh-TW" altLang="en-US"/>
           </a:p>
@@ -8979,7 +8979,7 @@
           <a:p>
             <a:r>
               <a:rPr kumimoji="0" lang="en-US" altLang="zh-TW"/>
-              <a:t>Big Data Analytics, Fall 2025</a:t>
+              <a:t>Big Data Analytics, Fall 2026</a:t>
             </a:r>
           </a:p>
         </p:txBody>
@@ -9389,7 +9389,7 @@
           <a:p>
             <a:r>
               <a:rPr lang="en-US" altLang="zh-TW"/>
-              <a:t>Big Data Analytics, Fall 2025</a:t>
+              <a:t>Big Data Analytics, Fall 2026</a:t>
             </a:r>
             <a:endParaRPr lang="zh-TW" altLang="en-US"/>
           </a:p>
@@ -13968,7 +13968,7 @@
           <a:p>
             <a:r>
               <a:rPr lang="en-US" altLang="zh-TW"/>
-              <a:t>Big Data Analytics, Fall 2025</a:t>
+              <a:t>Big Data Analytics, Fall 2026</a:t>
             </a:r>
             <a:endParaRPr lang="zh-TW" altLang="en-US"/>
           </a:p>
@@ -14226,7 +14226,7 @@
           <a:p>
             <a:r>
               <a:rPr kumimoji="0" lang="en-US" altLang="zh-TW"/>
-              <a:t>Big Data Analytics, Fall 2025</a:t>
+              <a:t>Big Data Analytics, Fall 2026</a:t>
             </a:r>
           </a:p>
         </p:txBody>
@@ -14654,7 +14654,7 @@
             </a:pPr>
             <a:r>
               <a:rPr lang="en-US" altLang="zh-TW"/>
-              <a:t>Big Data Analytics, Fall 2025</a:t>
+              <a:t>Big Data Analytics, Fall 2026</a:t>
             </a:r>
           </a:p>
         </p:txBody>
@@ -14848,7 +14848,7 @@
             </a:pPr>
             <a:r>
               <a:rPr lang="en-US" altLang="zh-TW"/>
-              <a:t>Big Data Analytics, Fall 2025</a:t>
+              <a:t>Big Data Analytics, Fall 2026</a:t>
             </a:r>
           </a:p>
         </p:txBody>
@@ -15037,7 +15037,7 @@
             </a:pPr>
             <a:r>
               <a:rPr lang="en-US" altLang="zh-TW"/>
-              <a:t>Big Data Analytics, Fall 2025</a:t>
+              <a:t>Big Data Analytics, Fall 2026</a:t>
             </a:r>
           </a:p>
         </p:txBody>
@@ -15226,7 +15226,7 @@
             </a:pPr>
             <a:r>
               <a:rPr lang="en-US" altLang="zh-TW"/>
-              <a:t>Big Data Analytics, Fall 2025</a:t>
+              <a:t>Big Data Analytics, Fall 2026</a:t>
             </a:r>
           </a:p>
         </p:txBody>
@@ -15390,7 +15390,7 @@
           <a:p>
             <a:r>
               <a:rPr lang="en-US" altLang="zh-TW"/>
-              <a:t>Big Data Analytics, Fall 2025</a:t>
+              <a:t>Big Data Analytics, Fall 2026</a:t>
             </a:r>
             <a:endParaRPr lang="zh-TW" altLang="en-US"/>
           </a:p>
@@ -15576,7 +15576,7 @@
             </a:pPr>
             <a:r>
               <a:rPr lang="en-US" altLang="zh-TW"/>
-              <a:t>Big Data Analytics, Fall 2025</a:t>
+              <a:t>Big Data Analytics, Fall 2026</a:t>
             </a:r>
           </a:p>
         </p:txBody>
@@ -15771,7 +15771,7 @@
           <a:p>
             <a:r>
               <a:rPr lang="en-US" altLang="zh-TW"/>
-              <a:t>Big Data Analytics, Fall 2025</a:t>
+              <a:t>Big Data Analytics, Fall 2026</a:t>
             </a:r>
             <a:endParaRPr lang="zh-TW" altLang="en-US"/>
           </a:p>
@@ -15957,7 +15957,7 @@
             </a:pPr>
             <a:r>
               <a:rPr lang="en-US" altLang="zh-TW"/>
-              <a:t>Big Data Analytics, Fall 2025</a:t>
+              <a:t>Big Data Analytics, Fall 2026</a:t>
             </a:r>
             <a:endParaRPr lang="en-US" altLang="zh-TW" dirty="0"/>
           </a:p>
@@ -16182,7 +16182,7 @@
           <a:p>
             <a:r>
               <a:rPr lang="en-US" altLang="zh-TW"/>
-              <a:t>Big Data Analytics, Fall 2025</a:t>
+              <a:t>Big Data Analytics, Fall 2026</a:t>
             </a:r>
             <a:endParaRPr lang="zh-TW" altLang="en-US"/>
           </a:p>
@@ -19420,7 +19420,7 @@
           <a:p>
             <a:r>
               <a:rPr lang="en-US" altLang="zh-TW"/>
-              <a:t>Big Data Analytics, Fall 2025</a:t>
+              <a:t>Big Data Analytics, Fall 2026</a:t>
             </a:r>
             <a:endParaRPr lang="zh-TW" altLang="en-US"/>
           </a:p>
@@ -19847,7 +19847,7 @@
           <a:p>
             <a:r>
               <a:rPr lang="en-US" altLang="zh-TW"/>
-              <a:t>Big Data Analytics, Fall 2025</a:t>
+              <a:t>Big Data Analytics, Fall 2026</a:t>
             </a:r>
             <a:endParaRPr lang="zh-TW" altLang="en-US"/>
           </a:p>
@@ -20253,7 +20253,7 @@
           <a:p>
             <a:r>
               <a:rPr lang="en-US" altLang="zh-TW"/>
-              <a:t>Big Data Analytics, Fall 2025</a:t>
+              <a:t>Big Data Analytics, Fall 2026</a:t>
             </a:r>
             <a:endParaRPr lang="zh-TW" altLang="en-US"/>
           </a:p>
@@ -20591,7 +20591,7 @@
           <a:p>
             <a:r>
               <a:rPr lang="en-US" altLang="zh-TW"/>
-              <a:t>Big Data Analytics, Fall 2025</a:t>
+              <a:t>Big Data Analytics, Fall 2026</a:t>
             </a:r>
             <a:endParaRPr lang="zh-TW" altLang="en-US"/>
           </a:p>
@@ -20828,7 +20828,7 @@
           <a:p>
             <a:r>
               <a:rPr kumimoji="0" lang="en-US" altLang="zh-TW"/>
-              <a:t>Big Data Analytics, Fall 2025</a:t>
+              <a:t>Big Data Analytics, Fall 2026</a:t>
             </a:r>
           </a:p>
         </p:txBody>
@@ -21303,7 +21303,7 @@
           <a:p>
             <a:r>
               <a:rPr kumimoji="0" lang="en-US" altLang="zh-TW"/>
-              <a:t>Big Data Analytics, Fall 2025</a:t>
+              <a:t>Big Data Analytics, Fall 2026</a:t>
             </a:r>
           </a:p>
         </p:txBody>
@@ -21933,7 +21933,7 @@
               <a:rPr kumimoji="0" lang="en-US" altLang="zh-TW" sz="1400">
                 <a:latin typeface="Arial" panose="020B0604020202020204" pitchFamily="34" charset="0"/>
               </a:rPr>
-              <a:t>Big Data Analytics, Fall 2025</a:t>
+              <a:t>Big Data Analytics, Fall 2026</a:t>
             </a:r>
           </a:p>
         </p:txBody>
@@ -22373,7 +22373,7 @@
           <a:p>
             <a:r>
               <a:rPr lang="en-US" altLang="zh-TW"/>
-              <a:t>Big Data Analytics, Fall 2025</a:t>
+              <a:t>Big Data Analytics, Fall 2026</a:t>
             </a:r>
             <a:endParaRPr lang="zh-TW" altLang="en-US"/>
           </a:p>
@@ -22633,7 +22633,7 @@
           <a:p>
             <a:r>
               <a:rPr kumimoji="0" lang="en-US" altLang="zh-TW"/>
-              <a:t>Big Data Analytics, Fall 2025</a:t>
+              <a:t>Big Data Analytics, Fall 2026</a:t>
             </a:r>
           </a:p>
         </p:txBody>
@@ -23121,7 +23121,7 @@
           <a:p>
             <a:r>
               <a:rPr kumimoji="0" lang="en-US" altLang="zh-TW"/>
-              <a:t>Big Data Analytics, Fall 2025</a:t>
+              <a:t>Big Data Analytics, Fall 2026</a:t>
             </a:r>
           </a:p>
         </p:txBody>
@@ -23509,7 +23509,7 @@
           <a:p>
             <a:r>
               <a:rPr lang="en-US" altLang="zh-TW"/>
-              <a:t>Big Data Analytics, Fall 2025</a:t>
+              <a:t>Big Data Analytics, Fall 2026</a:t>
             </a:r>
             <a:endParaRPr lang="zh-TW" altLang="en-US"/>
           </a:p>
@@ -23818,7 +23818,7 @@
           <a:p>
             <a:r>
               <a:rPr lang="en-US" altLang="zh-TW"/>
-              <a:t>Big Data Analytics, Fall 2025</a:t>
+              <a:t>Big Data Analytics, Fall 2026</a:t>
             </a:r>
             <a:endParaRPr lang="zh-TW" altLang="en-US"/>
           </a:p>
@@ -24131,7 +24131,7 @@
           <a:p>
             <a:r>
               <a:rPr lang="en-US" altLang="zh-TW"/>
-              <a:t>Big Data Analytics, Fall 2025</a:t>
+              <a:t>Big Data Analytics, Fall 2026</a:t>
             </a:r>
             <a:endParaRPr lang="zh-TW" altLang="en-US"/>
           </a:p>
@@ -24394,7 +24394,7 @@
           <a:p>
             <a:r>
               <a:rPr kumimoji="0" lang="en-US" altLang="zh-TW"/>
-              <a:t>Big Data Analytics, Fall 2025</a:t>
+              <a:t>Big Data Analytics, Fall 2026</a:t>
             </a:r>
             <a:endParaRPr kumimoji="0" lang="zh-TW" altLang="en-US"/>
           </a:p>
@@ -24871,7 +24871,7 @@
           <a:p>
             <a:r>
               <a:rPr kumimoji="0" lang="en-US" altLang="zh-TW"/>
-              <a:t>Big Data Analytics, Fall 2025</a:t>
+              <a:t>Big Data Analytics, Fall 2026</a:t>
             </a:r>
             <a:endParaRPr kumimoji="0" lang="zh-TW" altLang="en-US"/>
           </a:p>
@@ -25415,7 +25415,7 @@
           <a:p>
             <a:r>
               <a:rPr lang="en-US" altLang="zh-TW"/>
-              <a:t>Big Data Analytics, Fall 2025</a:t>
+              <a:t>Big Data Analytics, Fall 2026</a:t>
             </a:r>
             <a:endParaRPr lang="zh-TW" altLang="en-US"/>
           </a:p>
@@ -25556,7 +25556,7 @@
           <a:p>
             <a:r>
               <a:rPr lang="en-US" altLang="zh-TW"/>
-              <a:t>Big Data Analytics, Fall 2025</a:t>
+              <a:t>Big Data Analytics, Fall 2026</a:t>
             </a:r>
             <a:endParaRPr lang="zh-TW" altLang="en-US"/>
           </a:p>
@@ -25751,7 +25751,7 @@
           <a:p>
             <a:r>
               <a:rPr lang="en-US" altLang="zh-TW"/>
-              <a:t>Big Data Analytics, Fall 2025</a:t>
+              <a:t>Big Data Analytics, Fall 2026</a:t>
             </a:r>
             <a:endParaRPr lang="zh-TW" altLang="en-US"/>
           </a:p>
@@ -26136,7 +26136,7 @@
               <a:rPr kumimoji="0" lang="en-US" altLang="zh-TW" sz="1400">
                 <a:latin typeface="Arial" panose="020B0604020202020204" pitchFamily="34" charset="0"/>
               </a:rPr>
-              <a:t>Big Data Analytics, Fall 2025</a:t>
+              <a:t>Big Data Analytics, Fall 2026</a:t>
             </a:r>
           </a:p>
         </p:txBody>
@@ -26623,7 +26623,7 @@
           <a:p>
             <a:r>
               <a:rPr lang="en-US" altLang="zh-TW"/>
-              <a:t>Big Data Analytics, Fall 2025</a:t>
+              <a:t>Big Data Analytics, Fall 2026</a:t>
             </a:r>
             <a:endParaRPr lang="zh-TW" altLang="en-US"/>
           </a:p>
@@ -26860,7 +26860,7 @@
           <a:p>
             <a:r>
               <a:rPr lang="en-US" altLang="zh-TW"/>
-              <a:t>Big Data Analytics, Fall 2025</a:t>
+              <a:t>Big Data Analytics, Fall 2026</a:t>
             </a:r>
             <a:endParaRPr lang="zh-TW" altLang="en-US"/>
           </a:p>
@@ -27120,7 +27120,7 @@
           <a:p>
             <a:r>
               <a:rPr kumimoji="0" lang="en-US" altLang="zh-TW"/>
-              <a:t>Big Data Analytics, Fall 2025</a:t>
+              <a:t>Big Data Analytics, Fall 2026</a:t>
             </a:r>
           </a:p>
         </p:txBody>
@@ -27538,7 +27538,7 @@
           <a:p>
             <a:r>
               <a:rPr lang="en-US" altLang="zh-TW"/>
-              <a:t>Big Data Analytics, Fall 2025</a:t>
+              <a:t>Big Data Analytics, Fall 2026</a:t>
             </a:r>
             <a:endParaRPr lang="zh-TW" altLang="en-US"/>
           </a:p>
